--- a/classes/parte-15-seguridad-de-ia-y-machine-learning/299-ia-ofensiva-y-deepfakes/clase-299-presentacion.pptx
+++ b/classes/parte-15-seguridad-de-ia-y-machine-learning/299-ia-ofensiva-y-deepfakes/clase-299-presentacion.pptx
@@ -17,6 +17,10 @@
     <p:sldId id="265" r:id="rId16"/>
     <p:sldId id="266" r:id="rId17"/>
     <p:sldId id="267" r:id="rId18"/>
+    <p:sldId id="268" r:id="rId19"/>
+    <p:sldId id="269" r:id="rId20"/>
+    <p:sldId id="270" r:id="rId21"/>
+    <p:sldId id="271" r:id="rId22"/>
   </p:sldIdLst>
   <p:sldSz cx="9144000" cy="6858000" type="screen4x3"/>
   <p:notesSz cx="6858000" cy="9144000"/>
@@ -3198,7 +3202,7 @@
                   <a:srgbClr val="0B3D2E"/>
                 </a:solidFill>
               </a:rPr>
-              <a:t>⚠️ Errores comunes</a:t>
+              <a:t>🧪 Laboratorio guiado (defensivo)</a:t>
             </a:r>
           </a:p>
         </p:txBody>
@@ -3236,67 +3240,97 @@
                   <a:srgbClr val="22282E"/>
                 </a:solidFill>
               </a:rPr>
-              <a:t>•  Confiar solo en detectores de deepfake — Los detectores fallan y envejecen rápido. Prioriza procesos de verificación fuera de banda.</a:t>
-            </a:r>
-          </a:p>
-          <a:p>
-            <a:pPr>
-              <a:spcAft>
-                <a:spcPts val="600"/>
-              </a:spcAft>
-            </a:pPr>
-            <a:r>
-              <a:rPr sz="1500">
-                <a:solidFill>
-                  <a:srgbClr val="22282E"/>
-                </a:solidFill>
-              </a:rPr>
-              <a:t>•  "El correo es perfecto, será legítimo" — La IA elimina las señales de redacción. Verifica dominio, canal y contexto, no la calidad del texto.</a:t>
-            </a:r>
-          </a:p>
-          <a:p>
-            <a:pPr>
-              <a:spcAft>
-                <a:spcPts val="600"/>
-              </a:spcAft>
-            </a:pPr>
-            <a:r>
-              <a:rPr sz="1500">
-                <a:solidFill>
-                  <a:srgbClr val="22282E"/>
-                </a:solidFill>
-              </a:rPr>
-              <a:t>•  Autorizar pagos por urgencia — Ingeniería social clásica amplificada. La urgencia nunca anula el procedimiento.</a:t>
-            </a:r>
-          </a:p>
-          <a:p>
-            <a:pPr>
-              <a:spcAft>
-                <a:spcPts val="600"/>
-              </a:spcAft>
-            </a:pPr>
-            <a:r>
-              <a:rPr sz="1500">
-                <a:solidFill>
-                  <a:srgbClr val="22282E"/>
-                </a:solidFill>
-              </a:rPr>
-              <a:t>•  Asumir que C2PA prueba que algo es falso — C2PA prueba procedencia cuando está presente; su ausencia no prueba falsedad.</a:t>
-            </a:r>
-          </a:p>
-          <a:p>
-            <a:pPr>
-              <a:spcAft>
-                <a:spcPts val="600"/>
-              </a:spcAft>
-            </a:pPr>
-            <a:r>
-              <a:rPr sz="1500">
-                <a:solidFill>
-                  <a:srgbClr val="22282E"/>
-                </a:solidFill>
-              </a:rPr>
-              <a:t>•  Hacer pruebas con voces/rostros de terceros — Ilegal y poco ético. Usa solo material propio y consentido.</a:t>
+              <a:t>•  Todo con material propio/consentido y foco en detección y proceso.</a:t>
+            </a:r>
+          </a:p>
+          <a:p>
+            <a:pPr>
+              <a:spcAft>
+                <a:spcPts val="600"/>
+              </a:spcAft>
+            </a:pPr>
+            <a:r>
+              <a:rPr sz="1500">
+                <a:solidFill>
+                  <a:srgbClr val="22282E"/>
+                </a:solidFill>
+              </a:rPr>
+              <a:t>•  Analiza un correo de phishing potenciado por IA. Toma un ejemplo (propio o de un repositorio de concienciación) y lista qué señales clásicas han desaparecido (gramática, genericidad) y qué señales…</a:t>
+            </a:r>
+          </a:p>
+          <a:p>
+            <a:pPr>
+              <a:spcAft>
+                <a:spcPts val="600"/>
+              </a:spcAft>
+            </a:pPr>
+            <a:r>
+              <a:rPr sz="1500">
+                <a:solidFill>
+                  <a:srgbClr val="22282E"/>
+                </a:solidFill>
+              </a:rPr>
+              <a:t>•  Inspecciona procedencia con C2PA. Sobre una imagen con Content Credentials, verifica la firma y el historial de ediciones. Sobre una sin credenciales, discute qué NO puedes afirmar.</a:t>
+            </a:r>
+          </a:p>
+          <a:p>
+            <a:pPr>
+              <a:spcAft>
+                <a:spcPts val="600"/>
+              </a:spcAft>
+            </a:pPr>
+            <a:r>
+              <a:rPr sz="1500">
+                <a:solidFill>
+                  <a:srgbClr val="22282E"/>
+                </a:solidFill>
+              </a:rPr>
+              <a:t>•  Prueba un detector de contenido sintético con imágenes/voz propias (generadas con consentimiento o de repositorios de investigación). Mide su fiabilidad: anota falsos positivos y negativos. Concluye…</a:t>
+            </a:r>
+          </a:p>
+          <a:p>
+            <a:pPr>
+              <a:spcAft>
+                <a:spcPts val="600"/>
+              </a:spcAft>
+            </a:pPr>
+            <a:r>
+              <a:rPr sz="1500">
+                <a:solidFill>
+                  <a:srgbClr val="22282E"/>
+                </a:solidFill>
+              </a:rPr>
+              <a:t>•  Diseña un control anti-vishing. Define un procedimiento: toda solicitud de transferencia o cambio de datos bancarios requiere verificación fuera de banda con un código/canal acordado, sin excepciones…</a:t>
+            </a:r>
+          </a:p>
+          <a:p>
+            <a:pPr>
+              <a:spcAft>
+                <a:spcPts val="600"/>
+              </a:spcAft>
+            </a:pPr>
+            <a:r>
+              <a:rPr sz="1500">
+                <a:solidFill>
+                  <a:srgbClr val="22282E"/>
+                </a:solidFill>
+              </a:rPr>
+              <a:t>•  Simula un intento de fraude (role-play consentido). Un compañero interpreta al "CEO" pidiendo una transferencia urgente; el resto aplica el procedimiento. Evalúa dónde falla el proceso, no las…</a:t>
+            </a:r>
+          </a:p>
+          <a:p>
+            <a:pPr>
+              <a:spcAft>
+                <a:spcPts val="600"/>
+              </a:spcAft>
+            </a:pPr>
+            <a:r>
+              <a:rPr sz="1500">
+                <a:solidFill>
+                  <a:srgbClr val="22282E"/>
+                </a:solidFill>
+              </a:rPr>
+              <a:t>•  Redacta guía de concienciación. Convierte lo aprendido en 5 reglas prácticas para empleados frente a ingeniería social potenciada por IA.</a:t>
             </a:r>
           </a:p>
         </p:txBody>
@@ -3347,7 +3381,7 @@
                   <a:srgbClr val="0B3D2E"/>
                 </a:solidFill>
               </a:rPr>
-              <a:t>❓ Preguntas frecuentes</a:t>
+              <a:t>✍️ Ejercicios</a:t>
             </a:r>
           </a:p>
         </p:txBody>
@@ -3385,97 +3419,82 @@
                   <a:srgbClr val="22282E"/>
                 </a:solidFill>
               </a:rPr>
-              <a:t>•  ❓ ¿La IA hace a los atacantes imparables?</a:t>
-            </a:r>
-          </a:p>
-          <a:p>
-            <a:pPr>
-              <a:spcAft>
-                <a:spcPts val="600"/>
-              </a:spcAft>
-            </a:pPr>
-            <a:r>
-              <a:rPr sz="1500">
-                <a:solidFill>
-                  <a:srgbClr val="22282E"/>
-                </a:solidFill>
-              </a:rPr>
-              <a:t>•  No. Baja la barrera de entrada y escala los ataques, pero las defensas de proceso (verificación fuera de banda, mínimo privilegio, MFA) siguen siendo efectivas porque no dependen de detectar el engaño.</a:t>
-            </a:r>
-          </a:p>
-          <a:p>
-            <a:pPr>
-              <a:spcAft>
-                <a:spcPts val="600"/>
-              </a:spcAft>
-            </a:pPr>
-            <a:r>
-              <a:rPr sz="1500">
-                <a:solidFill>
-                  <a:srgbClr val="22282E"/>
-                </a:solidFill>
-              </a:rPr>
-              <a:t>•  ❓ ¿Puedo detectar de forma fiable un deepfake?</a:t>
-            </a:r>
-          </a:p>
-          <a:p>
-            <a:pPr>
-              <a:spcAft>
-                <a:spcPts val="600"/>
-              </a:spcAft>
-            </a:pPr>
-            <a:r>
-              <a:rPr sz="1500">
-                <a:solidFill>
-                  <a:srgbClr val="22282E"/>
-                </a:solidFill>
-              </a:rPr>
-              <a:t>•  No de forma garantizada. Los detectores tienen falsos positivos y negativos y se degradan frente a nuevos generadores. Úsalos como señal, no como veredicto.</a:t>
-            </a:r>
-          </a:p>
-          <a:p>
-            <a:pPr>
-              <a:spcAft>
-                <a:spcPts val="600"/>
-              </a:spcAft>
-            </a:pPr>
-            <a:r>
-              <a:rPr sz="1500">
-                <a:solidFill>
-                  <a:srgbClr val="22282E"/>
-                </a:solidFill>
-              </a:rPr>
-              <a:t>•  ❓ ¿Qué es más útil, detección o procedencia?</a:t>
-            </a:r>
-          </a:p>
-          <a:p>
-            <a:pPr>
-              <a:spcAft>
-                <a:spcPts val="600"/>
-              </a:spcAft>
-            </a:pPr>
-            <a:r>
-              <a:rPr sz="1500">
-                <a:solidFill>
-                  <a:srgbClr val="22282E"/>
-                </a:solidFill>
-              </a:rPr>
-              <a:t>•  La procedencia (C2PA) es más prometedora a largo plazo: en vez de perseguir cada falsificación, verifica criptográficamente el origen del contenido auténtico. Requiere adopción del ecosistema.</a:t>
-            </a:r>
-          </a:p>
-          <a:p>
-            <a:pPr>
-              <a:spcAft>
-                <a:spcPts val="600"/>
-              </a:spcAft>
-            </a:pPr>
-            <a:r>
-              <a:rPr sz="1500">
-                <a:solidFill>
-                  <a:srgbClr val="22282E"/>
-                </a:solidFill>
-              </a:rPr>
-              <a:t>•  ❓ ¿Genera la IA malware indetectable?</a:t>
+              <a:t>•  Enumera 5 señales de phishing que la IA generativa ha vuelto obsoletas y 3 que siguen sirviendo.</a:t>
+            </a:r>
+          </a:p>
+          <a:p>
+            <a:pPr>
+              <a:spcAft>
+                <a:spcPts val="600"/>
+              </a:spcAft>
+            </a:pPr>
+            <a:r>
+              <a:rPr sz="1500">
+                <a:solidFill>
+                  <a:srgbClr val="22282E"/>
+                </a:solidFill>
+              </a:rPr>
+              <a:t>•  Explica a alto nivel cómo se clona una voz y por qué basta poco audio.</a:t>
+            </a:r>
+          </a:p>
+          <a:p>
+            <a:pPr>
+              <a:spcAft>
+                <a:spcPts val="600"/>
+              </a:spcAft>
+            </a:pPr>
+            <a:r>
+              <a:rPr sz="1500">
+                <a:solidFill>
+                  <a:srgbClr val="22282E"/>
+                </a:solidFill>
+              </a:rPr>
+              <a:t>•  Compara "detección de deepfakes" vs. "procedencia C2PA" como estrategias y sus límites.</a:t>
+            </a:r>
+          </a:p>
+          <a:p>
+            <a:pPr>
+              <a:spcAft>
+                <a:spcPts val="600"/>
+              </a:spcAft>
+            </a:pPr>
+            <a:r>
+              <a:rPr sz="1500">
+                <a:solidFill>
+                  <a:srgbClr val="22282E"/>
+                </a:solidFill>
+              </a:rPr>
+              <a:t>•  Diseña el procedimiento fuera de banda para autorizar pagos por encima de un umbral.</a:t>
+            </a:r>
+          </a:p>
+          <a:p>
+            <a:pPr>
+              <a:spcAft>
+                <a:spcPts val="600"/>
+              </a:spcAft>
+            </a:pPr>
+            <a:r>
+              <a:rPr sz="1500">
+                <a:solidFill>
+                  <a:srgbClr val="22282E"/>
+                </a:solidFill>
+              </a:rPr>
+              <a:t>•  Evalúa la fiabilidad de un detector de imágenes sintéticas con un pequeño conjunto propio.</a:t>
+            </a:r>
+          </a:p>
+          <a:p>
+            <a:pPr>
+              <a:spcAft>
+                <a:spcPts val="600"/>
+              </a:spcAft>
+            </a:pPr>
+            <a:r>
+              <a:rPr sz="1500">
+                <a:solidFill>
+                  <a:srgbClr val="22282E"/>
+                </a:solidFill>
+              </a:rPr>
+              <a:t>•  Redacta un guion de simulacro de vishing ético y consentido para tu organización.</a:t>
             </a:r>
           </a:p>
         </p:txBody>
@@ -3526,7 +3545,7 @@
                   <a:srgbClr val="0B3D2E"/>
                 </a:solidFill>
               </a:rPr>
-              <a:t>🔗 Referencias</a:t>
+              <a:t>📝 Reto verificable</a:t>
             </a:r>
           </a:p>
         </p:txBody>
@@ -3564,6 +3583,438 @@
                   <a:srgbClr val="22282E"/>
                 </a:solidFill>
               </a:rPr>
+              <a:t>•  Entrega un paquete de defensa anti-suplantación IA: (a) análisis de un caso de BEC/deepfake, (b) un procedimiento documentado de verificación fuera de banda para acciones sensibles, y (c) una guía de…</a:t>
+            </a:r>
+          </a:p>
+          <a:p>
+            <a:pPr>
+              <a:spcAft>
+                <a:spcPts val="600"/>
+              </a:spcAft>
+            </a:pPr>
+            <a:r>
+              <a:rPr sz="1500">
+                <a:solidFill>
+                  <a:srgbClr val="22282E"/>
+                </a:solidFill>
+              </a:rPr>
+              <a:t>•  Criterio de aceptación: el procedimiento fuera de banda define umbral, canal alternativo acordado y regla de "sin excepciones por urgencia", y el caso analizado demuestra por qué la detección técnica…</a:t>
+            </a:r>
+          </a:p>
+        </p:txBody>
+      </p:sp>
+    </p:spTree>
+  </p:cSld>
+  <p:clrMapOvr>
+    <a:masterClrMapping/>
+  </p:clrMapOvr>
+</p:sld>
+</file>
+
+<file path=ppt/slides/slide13.xml><?xml version="1.0" encoding="utf-8"?>
+<p:sld xmlns:a="http://schemas.openxmlformats.org/drawingml/2006/main" xmlns:p="http://schemas.openxmlformats.org/presentationml/2006/main" xmlns:r="http://schemas.openxmlformats.org/officeDocument/2006/relationships">
+  <p:cSld>
+    <p:spTree>
+      <p:nvGrpSpPr>
+        <p:cNvPr id="1" name=""/>
+        <p:cNvGrpSpPr/>
+        <p:nvPr/>
+      </p:nvGrpSpPr>
+      <p:grpSpPr/>
+      <p:sp>
+        <p:nvSpPr>
+          <p:cNvPr id="2" name="TextBox 1"/>
+          <p:cNvSpPr txBox="1"/>
+          <p:nvPr/>
+        </p:nvSpPr>
+        <p:spPr>
+          <a:xfrm>
+            <a:off x="457200" y="320040"/>
+            <a:ext cx="8229600" cy="822960"/>
+          </a:xfrm>
+          <a:prstGeom prst="rect">
+            <a:avLst/>
+          </a:prstGeom>
+          <a:noFill/>
+        </p:spPr>
+        <p:txBody>
+          <a:bodyPr wrap="square">
+            <a:spAutoFit/>
+          </a:bodyPr>
+          <a:lstStyle/>
+          <a:p>
+            <a:r>
+              <a:rPr sz="2600" b="1">
+                <a:solidFill>
+                  <a:srgbClr val="0B3D2E"/>
+                </a:solidFill>
+              </a:rPr>
+              <a:t>⚠️ Errores comunes</a:t>
+            </a:r>
+          </a:p>
+        </p:txBody>
+      </p:sp>
+      <p:sp>
+        <p:nvSpPr>
+          <p:cNvPr id="3" name="TextBox 2"/>
+          <p:cNvSpPr txBox="1"/>
+          <p:nvPr/>
+        </p:nvSpPr>
+        <p:spPr>
+          <a:xfrm>
+            <a:off x="457200" y="1280160"/>
+            <a:ext cx="8229600" cy="4937760"/>
+          </a:xfrm>
+          <a:prstGeom prst="rect">
+            <a:avLst/>
+          </a:prstGeom>
+          <a:noFill/>
+        </p:spPr>
+        <p:txBody>
+          <a:bodyPr wrap="square">
+            <a:spAutoFit/>
+          </a:bodyPr>
+          <a:lstStyle/>
+          <a:p>
+            <a:pPr>
+              <a:spcAft>
+                <a:spcPts val="600"/>
+              </a:spcAft>
+            </a:pPr>
+            <a:r>
+              <a:rPr sz="1500">
+                <a:solidFill>
+                  <a:srgbClr val="22282E"/>
+                </a:solidFill>
+              </a:rPr>
+              <a:t>•  Confiar solo en detectores de deepfake — Los detectores fallan y envejecen rápido. Prioriza procesos de verificación fuera de banda.</a:t>
+            </a:r>
+          </a:p>
+          <a:p>
+            <a:pPr>
+              <a:spcAft>
+                <a:spcPts val="600"/>
+              </a:spcAft>
+            </a:pPr>
+            <a:r>
+              <a:rPr sz="1500">
+                <a:solidFill>
+                  <a:srgbClr val="22282E"/>
+                </a:solidFill>
+              </a:rPr>
+              <a:t>•  "El correo es perfecto, será legítimo" — La IA elimina las señales de redacción. Verifica dominio, canal y contexto, no la calidad del texto.</a:t>
+            </a:r>
+          </a:p>
+          <a:p>
+            <a:pPr>
+              <a:spcAft>
+                <a:spcPts val="600"/>
+              </a:spcAft>
+            </a:pPr>
+            <a:r>
+              <a:rPr sz="1500">
+                <a:solidFill>
+                  <a:srgbClr val="22282E"/>
+                </a:solidFill>
+              </a:rPr>
+              <a:t>•  Autorizar pagos por urgencia — Ingeniería social clásica amplificada. La urgencia nunca anula el procedimiento.</a:t>
+            </a:r>
+          </a:p>
+          <a:p>
+            <a:pPr>
+              <a:spcAft>
+                <a:spcPts val="600"/>
+              </a:spcAft>
+            </a:pPr>
+            <a:r>
+              <a:rPr sz="1500">
+                <a:solidFill>
+                  <a:srgbClr val="22282E"/>
+                </a:solidFill>
+              </a:rPr>
+              <a:t>•  Asumir que C2PA prueba que algo es falso — C2PA prueba procedencia cuando está presente; su ausencia no prueba falsedad.</a:t>
+            </a:r>
+          </a:p>
+          <a:p>
+            <a:pPr>
+              <a:spcAft>
+                <a:spcPts val="600"/>
+              </a:spcAft>
+            </a:pPr>
+            <a:r>
+              <a:rPr sz="1500">
+                <a:solidFill>
+                  <a:srgbClr val="22282E"/>
+                </a:solidFill>
+              </a:rPr>
+              <a:t>•  Hacer pruebas con voces/rostros de terceros — Ilegal y poco ético. Usa solo material propio y consentido.</a:t>
+            </a:r>
+          </a:p>
+        </p:txBody>
+      </p:sp>
+    </p:spTree>
+  </p:cSld>
+  <p:clrMapOvr>
+    <a:masterClrMapping/>
+  </p:clrMapOvr>
+</p:sld>
+</file>
+
+<file path=ppt/slides/slide14.xml><?xml version="1.0" encoding="utf-8"?>
+<p:sld xmlns:a="http://schemas.openxmlformats.org/drawingml/2006/main" xmlns:p="http://schemas.openxmlformats.org/presentationml/2006/main" xmlns:r="http://schemas.openxmlformats.org/officeDocument/2006/relationships">
+  <p:cSld>
+    <p:spTree>
+      <p:nvGrpSpPr>
+        <p:cNvPr id="1" name=""/>
+        <p:cNvGrpSpPr/>
+        <p:nvPr/>
+      </p:nvGrpSpPr>
+      <p:grpSpPr/>
+      <p:sp>
+        <p:nvSpPr>
+          <p:cNvPr id="2" name="TextBox 1"/>
+          <p:cNvSpPr txBox="1"/>
+          <p:nvPr/>
+        </p:nvSpPr>
+        <p:spPr>
+          <a:xfrm>
+            <a:off x="457200" y="320040"/>
+            <a:ext cx="8229600" cy="822960"/>
+          </a:xfrm>
+          <a:prstGeom prst="rect">
+            <a:avLst/>
+          </a:prstGeom>
+          <a:noFill/>
+        </p:spPr>
+        <p:txBody>
+          <a:bodyPr wrap="square">
+            <a:spAutoFit/>
+          </a:bodyPr>
+          <a:lstStyle/>
+          <a:p>
+            <a:r>
+              <a:rPr sz="2600" b="1">
+                <a:solidFill>
+                  <a:srgbClr val="0B3D2E"/>
+                </a:solidFill>
+              </a:rPr>
+              <a:t>❓ Preguntas frecuentes</a:t>
+            </a:r>
+          </a:p>
+        </p:txBody>
+      </p:sp>
+      <p:sp>
+        <p:nvSpPr>
+          <p:cNvPr id="3" name="TextBox 2"/>
+          <p:cNvSpPr txBox="1"/>
+          <p:nvPr/>
+        </p:nvSpPr>
+        <p:spPr>
+          <a:xfrm>
+            <a:off x="457200" y="1280160"/>
+            <a:ext cx="8229600" cy="4937760"/>
+          </a:xfrm>
+          <a:prstGeom prst="rect">
+            <a:avLst/>
+          </a:prstGeom>
+          <a:noFill/>
+        </p:spPr>
+        <p:txBody>
+          <a:bodyPr wrap="square">
+            <a:spAutoFit/>
+          </a:bodyPr>
+          <a:lstStyle/>
+          <a:p>
+            <a:pPr>
+              <a:spcAft>
+                <a:spcPts val="600"/>
+              </a:spcAft>
+            </a:pPr>
+            <a:r>
+              <a:rPr sz="1500">
+                <a:solidFill>
+                  <a:srgbClr val="22282E"/>
+                </a:solidFill>
+              </a:rPr>
+              <a:t>•  ❓ ¿La IA hace a los atacantes imparables?</a:t>
+            </a:r>
+          </a:p>
+          <a:p>
+            <a:pPr>
+              <a:spcAft>
+                <a:spcPts val="600"/>
+              </a:spcAft>
+            </a:pPr>
+            <a:r>
+              <a:rPr sz="1500">
+                <a:solidFill>
+                  <a:srgbClr val="22282E"/>
+                </a:solidFill>
+              </a:rPr>
+              <a:t>•  No. Baja la barrera de entrada y escala los ataques, pero las defensas de proceso (verificación fuera de banda, mínimo privilegio, MFA) siguen siendo efectivas porque no dependen de detectar el…</a:t>
+            </a:r>
+          </a:p>
+          <a:p>
+            <a:pPr>
+              <a:spcAft>
+                <a:spcPts val="600"/>
+              </a:spcAft>
+            </a:pPr>
+            <a:r>
+              <a:rPr sz="1500">
+                <a:solidFill>
+                  <a:srgbClr val="22282E"/>
+                </a:solidFill>
+              </a:rPr>
+              <a:t>•  ❓ ¿Puedo detectar de forma fiable un deepfake?</a:t>
+            </a:r>
+          </a:p>
+          <a:p>
+            <a:pPr>
+              <a:spcAft>
+                <a:spcPts val="600"/>
+              </a:spcAft>
+            </a:pPr>
+            <a:r>
+              <a:rPr sz="1500">
+                <a:solidFill>
+                  <a:srgbClr val="22282E"/>
+                </a:solidFill>
+              </a:rPr>
+              <a:t>•  No de forma garantizada. Los detectores tienen falsos positivos y negativos y se degradan frente a nuevos generadores. Úsalos como señal, no como veredicto.</a:t>
+            </a:r>
+          </a:p>
+          <a:p>
+            <a:pPr>
+              <a:spcAft>
+                <a:spcPts val="600"/>
+              </a:spcAft>
+            </a:pPr>
+            <a:r>
+              <a:rPr sz="1500">
+                <a:solidFill>
+                  <a:srgbClr val="22282E"/>
+                </a:solidFill>
+              </a:rPr>
+              <a:t>•  ❓ ¿Qué es más útil, detección o procedencia?</a:t>
+            </a:r>
+          </a:p>
+          <a:p>
+            <a:pPr>
+              <a:spcAft>
+                <a:spcPts val="600"/>
+              </a:spcAft>
+            </a:pPr>
+            <a:r>
+              <a:rPr sz="1500">
+                <a:solidFill>
+                  <a:srgbClr val="22282E"/>
+                </a:solidFill>
+              </a:rPr>
+              <a:t>•  La procedencia (C2PA) es más prometedora a largo plazo: en vez de perseguir cada falsificación, verifica criptográficamente el origen del contenido auténtico. Requiere adopción del ecosistema.</a:t>
+            </a:r>
+          </a:p>
+          <a:p>
+            <a:pPr>
+              <a:spcAft>
+                <a:spcPts val="600"/>
+              </a:spcAft>
+            </a:pPr>
+            <a:r>
+              <a:rPr sz="1500">
+                <a:solidFill>
+                  <a:srgbClr val="22282E"/>
+                </a:solidFill>
+              </a:rPr>
+              <a:t>•  ❓ ¿Genera la IA malware indetectable?</a:t>
+            </a:r>
+          </a:p>
+        </p:txBody>
+      </p:sp>
+    </p:spTree>
+  </p:cSld>
+  <p:clrMapOvr>
+    <a:masterClrMapping/>
+  </p:clrMapOvr>
+</p:sld>
+</file>
+
+<file path=ppt/slides/slide15.xml><?xml version="1.0" encoding="utf-8"?>
+<p:sld xmlns:a="http://schemas.openxmlformats.org/drawingml/2006/main" xmlns:p="http://schemas.openxmlformats.org/presentationml/2006/main" xmlns:r="http://schemas.openxmlformats.org/officeDocument/2006/relationships">
+  <p:cSld>
+    <p:spTree>
+      <p:nvGrpSpPr>
+        <p:cNvPr id="1" name=""/>
+        <p:cNvGrpSpPr/>
+        <p:nvPr/>
+      </p:nvGrpSpPr>
+      <p:grpSpPr/>
+      <p:sp>
+        <p:nvSpPr>
+          <p:cNvPr id="2" name="TextBox 1"/>
+          <p:cNvSpPr txBox="1"/>
+          <p:nvPr/>
+        </p:nvSpPr>
+        <p:spPr>
+          <a:xfrm>
+            <a:off x="457200" y="320040"/>
+            <a:ext cx="8229600" cy="822960"/>
+          </a:xfrm>
+          <a:prstGeom prst="rect">
+            <a:avLst/>
+          </a:prstGeom>
+          <a:noFill/>
+        </p:spPr>
+        <p:txBody>
+          <a:bodyPr wrap="square">
+            <a:spAutoFit/>
+          </a:bodyPr>
+          <a:lstStyle/>
+          <a:p>
+            <a:r>
+              <a:rPr sz="2600" b="1">
+                <a:solidFill>
+                  <a:srgbClr val="0B3D2E"/>
+                </a:solidFill>
+              </a:rPr>
+              <a:t>🔗 Referencias</a:t>
+            </a:r>
+          </a:p>
+        </p:txBody>
+      </p:sp>
+      <p:sp>
+        <p:nvSpPr>
+          <p:cNvPr id="3" name="TextBox 2"/>
+          <p:cNvSpPr txBox="1"/>
+          <p:nvPr/>
+        </p:nvSpPr>
+        <p:spPr>
+          <a:xfrm>
+            <a:off x="457200" y="1280160"/>
+            <a:ext cx="8229600" cy="4937760"/>
+          </a:xfrm>
+          <a:prstGeom prst="rect">
+            <a:avLst/>
+          </a:prstGeom>
+          <a:noFill/>
+        </p:spPr>
+        <p:txBody>
+          <a:bodyPr wrap="square">
+            <a:spAutoFit/>
+          </a:bodyPr>
+          <a:lstStyle/>
+          <a:p>
+            <a:pPr>
+              <a:spcAft>
+                <a:spcPts val="600"/>
+              </a:spcAft>
+            </a:pPr>
+            <a:r>
+              <a:rPr sz="1500">
+                <a:solidFill>
+                  <a:srgbClr val="22282E"/>
+                </a:solidFill>
+              </a:rPr>
               <a:t>•  MITRE ATLAS — &lt;https://atlas.mitre.org/&gt;</a:t>
             </a:r>
           </a:p>
@@ -3629,6 +4080,81 @@
           </a:p>
         </p:txBody>
       </p:sp>
+    </p:spTree>
+  </p:cSld>
+  <p:clrMapOvr>
+    <a:masterClrMapping/>
+  </p:clrMapOvr>
+</p:sld>
+</file>
+
+<file path=ppt/slides/slide16.xml><?xml version="1.0" encoding="utf-8"?>
+<p:sld xmlns:a="http://schemas.openxmlformats.org/drawingml/2006/main" xmlns:p="http://schemas.openxmlformats.org/presentationml/2006/main" xmlns:r="http://schemas.openxmlformats.org/officeDocument/2006/relationships">
+  <p:cSld>
+    <p:spTree>
+      <p:nvGrpSpPr>
+        <p:cNvPr id="1" name=""/>
+        <p:cNvGrpSpPr/>
+        <p:nvPr/>
+      </p:nvGrpSpPr>
+      <p:grpSpPr/>
+      <p:sp>
+        <p:nvSpPr>
+          <p:cNvPr id="2" name="TextBox 1"/>
+          <p:cNvSpPr txBox="1"/>
+          <p:nvPr/>
+        </p:nvSpPr>
+        <p:spPr>
+          <a:xfrm>
+            <a:off x="457200" y="274320"/>
+            <a:ext cx="8229600" cy="640080"/>
+          </a:xfrm>
+          <a:prstGeom prst="rect">
+            <a:avLst/>
+          </a:prstGeom>
+          <a:noFill/>
+        </p:spPr>
+        <p:txBody>
+          <a:bodyPr wrap="square">
+            <a:spAutoFit/>
+          </a:bodyPr>
+          <a:lstStyle/>
+          <a:p>
+            <a:r>
+              <a:rPr sz="2200" b="1">
+                <a:solidFill>
+                  <a:srgbClr val="0B3D2E"/>
+                </a:solidFill>
+              </a:rPr>
+              <a:t>Diagrama de la clase</a:t>
+            </a:r>
+          </a:p>
+        </p:txBody>
+      </p:sp>
+      <p:pic>
+        <p:nvPicPr>
+          <p:cNvPr id="3" name="Picture 2" descr="48c17c5ea00a330e.png"/>
+          <p:cNvPicPr>
+            <a:picLocks noChangeAspect="1"/>
+          </p:cNvPicPr>
+          <p:nvPr/>
+        </p:nvPicPr>
+        <p:blipFill>
+          <a:blip r:embed="rId2"/>
+          <a:stretch>
+            <a:fillRect/>
+          </a:stretch>
+        </p:blipFill>
+        <p:spPr>
+          <a:xfrm>
+            <a:off x="457200" y="3317848"/>
+            <a:ext cx="8229599" cy="862383"/>
+          </a:xfrm>
+          <a:prstGeom prst="rect">
+            <a:avLst/>
+          </a:prstGeom>
+        </p:spPr>
+      </p:pic>
     </p:spTree>
   </p:cSld>
   <p:clrMapOvr>
@@ -3713,7 +4239,7 @@
                   <a:srgbClr val="22282E"/>
                 </a:solidFill>
               </a:rPr>
-              <a:t>•  Comprender cómo los atacantes aprovechan la IA generativa —phishing hiperpersonalizado, deepfakes de voz e imagen, malware asistido, automatización de reconocimiento— y, sobre todo, cómo defenderse: detección de contenido sintético, procedencia (C2PA), verificación fuera de banda y concienciación. El enfoque es defensivo: entender la amenaza para neutralizarla.</a:t>
+              <a:t>•  Comprender cómo los atacantes aprovechan la IA generativa —phishing hiperpersonalizado, deepfakes de voz e imagen, malware asistido, automatización de reconocimiento— y, sobre todo, cómo defenderse…</a:t>
             </a:r>
           </a:p>
         </p:txBody>
@@ -4107,7 +4633,7 @@
                   <a:srgbClr val="0B3D2E"/>
                 </a:solidFill>
               </a:rPr>
-              <a:t>📖 Definiciones y características</a:t>
+              <a:t>🧠 Explicación en profundidad</a:t>
             </a:r>
           </a:p>
         </p:txBody>
@@ -4145,82 +4671,37 @@
                   <a:srgbClr val="22282E"/>
                 </a:solidFill>
               </a:rPr>
-              <a:t>•  Deepfake: contenido sintético (voz, imagen, vídeo) generado o alterado con IA para parecer real. Característica: la calidad crece más rápido que la detección.</a:t>
-            </a:r>
-          </a:p>
-          <a:p>
-            <a:pPr>
-              <a:spcAft>
-                <a:spcPts val="600"/>
-              </a:spcAft>
-            </a:pPr>
-            <a:r>
-              <a:rPr sz="1500">
-                <a:solidFill>
-                  <a:srgbClr val="22282E"/>
-                </a:solidFill>
-              </a:rPr>
-              <a:t>•  Vishing con clonación de voz: llamada fraudulenta usando una voz clonada de un directivo conocido. Característica: explota confianza y urgencia; deriva en transferencias.</a:t>
-            </a:r>
-          </a:p>
-          <a:p>
-            <a:pPr>
-              <a:spcAft>
-                <a:spcPts val="600"/>
-              </a:spcAft>
-            </a:pPr>
-            <a:r>
-              <a:rPr sz="1500">
-                <a:solidFill>
-                  <a:srgbClr val="22282E"/>
-                </a:solidFill>
-              </a:rPr>
-              <a:t>•  BEC (Business Email Compromise) asistido: correos de fraude redactados por LLM, sin errores idiomáticos y personalizados con OSINT. Característica: elimina las señales clásicas del phishing.</a:t>
-            </a:r>
-          </a:p>
-          <a:p>
-            <a:pPr>
-              <a:spcAft>
-                <a:spcPts val="600"/>
-              </a:spcAft>
-            </a:pPr>
-            <a:r>
-              <a:rPr sz="1500">
-                <a:solidFill>
-                  <a:srgbClr val="22282E"/>
-                </a:solidFill>
-              </a:rPr>
-              <a:t>•  C2PA / Content Credentials: estándar de procedencia que firma criptográficamente el origen y las ediciones de un contenido. Característica: verifica autenticidad en lugar de detectar falsedad.</a:t>
-            </a:r>
-          </a:p>
-          <a:p>
-            <a:pPr>
-              <a:spcAft>
-                <a:spcPts val="600"/>
-              </a:spcAft>
-            </a:pPr>
-            <a:r>
-              <a:rPr sz="1500">
-                <a:solidFill>
-                  <a:srgbClr val="22282E"/>
-                </a:solidFill>
-              </a:rPr>
-              <a:t>•  Watermarking de IA: marca imperceptible incrustada en contenido generado para identificarlo. Característica: frágil ante recompresión/edición.</a:t>
-            </a:r>
-          </a:p>
-          <a:p>
-            <a:pPr>
-              <a:spcAft>
-                <a:spcPts val="600"/>
-              </a:spcAft>
-            </a:pPr>
-            <a:r>
-              <a:rPr sz="1500">
-                <a:solidFill>
-                  <a:srgbClr val="22282E"/>
-                </a:solidFill>
-              </a:rPr>
-              <a:t>•  Verificación fuera de banda: confirmar una solicitud sensible por un canal distinto y previamente acordado. Característica: control organizativo robusto contra suplantación.</a:t>
+              <a:t>•  La IA ofensiva y los medios sintéticos cambian escala y coste, no eliminan requisitos de autorización ni garantizan eficacia. La defensa combina procedencia, autenticación de procesos, verificación…</a:t>
+            </a:r>
+          </a:p>
+          <a:p>
+            <a:pPr>
+              <a:spcAft>
+                <a:spcPts val="600"/>
+              </a:spcAft>
+            </a:pPr>
+            <a:r>
+              <a:rPr sz="1500">
+                <a:solidFill>
+                  <a:srgbClr val="22282E"/>
+                </a:solidFill>
+              </a:rPr>
+              <a:t>•  El diagrama debe leerse como una cadena de supuestos: verificar un nodo no demuestra los siguientes. La evaluación declara actor, acceso, datos, métrica, umbral y consecuencia; compara una línea base…</a:t>
+            </a:r>
+          </a:p>
+          <a:p>
+            <a:pPr>
+              <a:spcAft>
+                <a:spcPts val="600"/>
+              </a:spcAft>
+            </a:pPr>
+            <a:r>
+              <a:rPr sz="1500">
+                <a:solidFill>
+                  <a:srgbClr val="22282E"/>
+                </a:solidFill>
+              </a:rPr>
+              <a:t>•  Una voz sintética supera la intuición, pero no el callback financiero. Se fortalece la transacción en vez de depender de detectar audio falso.</a:t>
             </a:r>
           </a:p>
         </p:txBody>
@@ -4271,7 +4752,7 @@
                   <a:srgbClr val="0B3D2E"/>
                 </a:solidFill>
               </a:rPr>
-              <a:t>🧰 Herramientas y preparación</a:t>
+              <a:t>📔 Glosario operativo</a:t>
             </a:r>
           </a:p>
         </p:txBody>
@@ -4309,52 +4790,52 @@
                   <a:srgbClr val="22282E"/>
                 </a:solidFill>
               </a:rPr>
-              <a:t>•  Estándar C2PA y verificadores de Content Credentials (para inspeccionar procedencia de imágenes propias).</a:t>
-            </a:r>
-          </a:p>
-          <a:p>
-            <a:pPr>
-              <a:spcAft>
-                <a:spcPts val="600"/>
-              </a:spcAft>
-            </a:pPr>
-            <a:r>
-              <a:rPr sz="1500">
-                <a:solidFill>
-                  <a:srgbClr val="22282E"/>
-                </a:solidFill>
-              </a:rPr>
-              <a:t>•  Detectores de contenido sintético como referencia (entendiendo su fiabilidad limitada).</a:t>
-            </a:r>
-          </a:p>
-          <a:p>
-            <a:pPr>
-              <a:spcAft>
-                <a:spcPts val="600"/>
-              </a:spcAft>
-            </a:pPr>
-            <a:r>
-              <a:rPr sz="1500">
-                <a:solidFill>
-                  <a:srgbClr val="22282E"/>
-                </a:solidFill>
-              </a:rPr>
-              <a:t>•  Material propio y consentido para pruebas (tu propia voz/imagen), nunca de terceros.</a:t>
-            </a:r>
-          </a:p>
-          <a:p>
-            <a:pPr>
-              <a:spcAft>
-                <a:spcPts val="600"/>
-              </a:spcAft>
-            </a:pPr>
-            <a:r>
-              <a:rPr sz="1500">
-                <a:solidFill>
-                  <a:srgbClr val="22282E"/>
-                </a:solidFill>
-              </a:rPr>
-              <a:t>•  Un procedimiento de laboratorio para simular un intento de fraude (role-play controlado con compañeros que consienten).</a:t>
+              <a:t>•  Término — Definición</a:t>
+            </a:r>
+          </a:p>
+          <a:p>
+            <a:pPr>
+              <a:spcAft>
+                <a:spcPts val="600"/>
+              </a:spcAft>
+            </a:pPr>
+            <a:r>
+              <a:rPr sz="1500">
+                <a:solidFill>
+                  <a:srgbClr val="22282E"/>
+                </a:solidFill>
+              </a:rPr>
+              <a:t>•  Deepfake — Medio sintético o manipulado que imita atributos humanos.</a:t>
+            </a:r>
+          </a:p>
+          <a:p>
+            <a:pPr>
+              <a:spcAft>
+                <a:spcPts val="600"/>
+              </a:spcAft>
+            </a:pPr>
+            <a:r>
+              <a:rPr sz="1500">
+                <a:solidFill>
+                  <a:srgbClr val="22282E"/>
+                </a:solidFill>
+              </a:rPr>
+              <a:t>•  Evaluación — Experimento reproducible ligado a un riesgo y criterio.</a:t>
+            </a:r>
+          </a:p>
+          <a:p>
+            <a:pPr>
+              <a:spcAft>
+                <a:spcPts val="600"/>
+              </a:spcAft>
+            </a:pPr>
+            <a:r>
+              <a:rPr sz="1500">
+                <a:solidFill>
+                  <a:srgbClr val="22282E"/>
+                </a:solidFill>
+              </a:rPr>
+              <a:t>•  Riesgo residual — Exposición que permanece tras controles.</a:t>
             </a:r>
           </a:p>
         </p:txBody>
@@ -4405,7 +4886,7 @@
                   <a:srgbClr val="0B3D2E"/>
                 </a:solidFill>
               </a:rPr>
-              <a:t>🧪 Laboratorio guiado (defensivo)</a:t>
+              <a:t>✅ Criterio de dominio</a:t>
             </a:r>
           </a:p>
         </p:txBody>
@@ -4443,97 +4924,7 @@
                   <a:srgbClr val="22282E"/>
                 </a:solidFill>
               </a:rPr>
-              <a:t>•  Todo con material propio/consentido y foco en detección y proceso.</a:t>
-            </a:r>
-          </a:p>
-          <a:p>
-            <a:pPr>
-              <a:spcAft>
-                <a:spcPts val="600"/>
-              </a:spcAft>
-            </a:pPr>
-            <a:r>
-              <a:rPr sz="1500">
-                <a:solidFill>
-                  <a:srgbClr val="22282E"/>
-                </a:solidFill>
-              </a:rPr>
-              <a:t>•  Analiza un correo de phishing potenciado por IA. Toma un ejemplo (propio o de un repositorio de concienciación) y lista qué señales clásicas han desaparecido (gramática, genericidad) y qué señales quedan (dominio, urgencia, canal de pago).</a:t>
-            </a:r>
-          </a:p>
-          <a:p>
-            <a:pPr>
-              <a:spcAft>
-                <a:spcPts val="600"/>
-              </a:spcAft>
-            </a:pPr>
-            <a:r>
-              <a:rPr sz="1500">
-                <a:solidFill>
-                  <a:srgbClr val="22282E"/>
-                </a:solidFill>
-              </a:rPr>
-              <a:t>•  Inspecciona procedencia con C2PA. Sobre una imagen con Content Credentials, verifica la firma y el historial de ediciones. Sobre una sin credenciales, discute qué NO puedes afirmar.</a:t>
-            </a:r>
-          </a:p>
-          <a:p>
-            <a:pPr>
-              <a:spcAft>
-                <a:spcPts val="600"/>
-              </a:spcAft>
-            </a:pPr>
-            <a:r>
-              <a:rPr sz="1500">
-                <a:solidFill>
-                  <a:srgbClr val="22282E"/>
-                </a:solidFill>
-              </a:rPr>
-              <a:t>•  Prueba un detector de contenido sintético con imágenes/voz propias (generadas con consentimiento o de repositorios de investigación). Mide su fiabilidad: anota falsos positivos y negativos. Concluye que la detección no es garantía.</a:t>
-            </a:r>
-          </a:p>
-          <a:p>
-            <a:pPr>
-              <a:spcAft>
-                <a:spcPts val="600"/>
-              </a:spcAft>
-            </a:pPr>
-            <a:r>
-              <a:rPr sz="1500">
-                <a:solidFill>
-                  <a:srgbClr val="22282E"/>
-                </a:solidFill>
-              </a:rPr>
-              <a:t>•  Diseña un control anti-vishing. Define un procedimiento: toda solicitud de transferencia o cambio de datos bancarios requiere verificación fuera de banda con un código/canal acordado, sin excepciones por urgencia.</a:t>
-            </a:r>
-          </a:p>
-          <a:p>
-            <a:pPr>
-              <a:spcAft>
-                <a:spcPts val="600"/>
-              </a:spcAft>
-            </a:pPr>
-            <a:r>
-              <a:rPr sz="1500">
-                <a:solidFill>
-                  <a:srgbClr val="22282E"/>
-                </a:solidFill>
-              </a:rPr>
-              <a:t>•  Simula un intento de fraude (role-play consentido). Un compañero interpreta al "CEO" pidiendo una transferencia urgente; el resto aplica el procedimiento. Evalúa dónde falla el proceso, no las personas.</a:t>
-            </a:r>
-          </a:p>
-          <a:p>
-            <a:pPr>
-              <a:spcAft>
-                <a:spcPts val="600"/>
-              </a:spcAft>
-            </a:pPr>
-            <a:r>
-              <a:rPr sz="1500">
-                <a:solidFill>
-                  <a:srgbClr val="22282E"/>
-                </a:solidFill>
-              </a:rPr>
-              <a:t>•  Redacta guía de concienciación. Convierte lo aprendido en 5 reglas prácticas para empleados frente a ingeniería social potenciada por IA.</a:t>
+              <a:t>•  El alumno demuestra dominio cuando formula un escenario específico, reproduce evidencia, explica límites y diseña controles técnicos y de gobierno sin atribuir certeza al modelo.</a:t>
             </a:r>
           </a:p>
         </p:txBody>
@@ -4584,7 +4975,7 @@
                   <a:srgbClr val="0B3D2E"/>
                 </a:solidFill>
               </a:rPr>
-              <a:t>✍️ Ejercicios</a:t>
+              <a:t>📖 Definiciones y características</a:t>
             </a:r>
           </a:p>
         </p:txBody>
@@ -4622,82 +5013,82 @@
                   <a:srgbClr val="22282E"/>
                 </a:solidFill>
               </a:rPr>
-              <a:t>•  Enumera 5 señales de phishing que la IA generativa ha vuelto obsoletas y 3 que siguen sirviendo.</a:t>
-            </a:r>
-          </a:p>
-          <a:p>
-            <a:pPr>
-              <a:spcAft>
-                <a:spcPts val="600"/>
-              </a:spcAft>
-            </a:pPr>
-            <a:r>
-              <a:rPr sz="1500">
-                <a:solidFill>
-                  <a:srgbClr val="22282E"/>
-                </a:solidFill>
-              </a:rPr>
-              <a:t>•  Explica a alto nivel cómo se clona una voz y por qué basta poco audio.</a:t>
-            </a:r>
-          </a:p>
-          <a:p>
-            <a:pPr>
-              <a:spcAft>
-                <a:spcPts val="600"/>
-              </a:spcAft>
-            </a:pPr>
-            <a:r>
-              <a:rPr sz="1500">
-                <a:solidFill>
-                  <a:srgbClr val="22282E"/>
-                </a:solidFill>
-              </a:rPr>
-              <a:t>•  Compara "detección de deepfakes" vs. "procedencia C2PA" como estrategias y sus límites.</a:t>
-            </a:r>
-          </a:p>
-          <a:p>
-            <a:pPr>
-              <a:spcAft>
-                <a:spcPts val="600"/>
-              </a:spcAft>
-            </a:pPr>
-            <a:r>
-              <a:rPr sz="1500">
-                <a:solidFill>
-                  <a:srgbClr val="22282E"/>
-                </a:solidFill>
-              </a:rPr>
-              <a:t>•  Diseña el procedimiento fuera de banda para autorizar pagos por encima de un umbral.</a:t>
-            </a:r>
-          </a:p>
-          <a:p>
-            <a:pPr>
-              <a:spcAft>
-                <a:spcPts val="600"/>
-              </a:spcAft>
-            </a:pPr>
-            <a:r>
-              <a:rPr sz="1500">
-                <a:solidFill>
-                  <a:srgbClr val="22282E"/>
-                </a:solidFill>
-              </a:rPr>
-              <a:t>•  Evalúa la fiabilidad de un detector de imágenes sintéticas con un pequeño conjunto propio.</a:t>
-            </a:r>
-          </a:p>
-          <a:p>
-            <a:pPr>
-              <a:spcAft>
-                <a:spcPts val="600"/>
-              </a:spcAft>
-            </a:pPr>
-            <a:r>
-              <a:rPr sz="1500">
-                <a:solidFill>
-                  <a:srgbClr val="22282E"/>
-                </a:solidFill>
-              </a:rPr>
-              <a:t>•  Redacta un guion de simulacro de vishing ético y consentido para tu organización.</a:t>
+              <a:t>•  Deepfake: contenido sintético (voz, imagen, vídeo) generado o alterado con IA para parecer real. Característica: la calidad crece más rápido que la detección.</a:t>
+            </a:r>
+          </a:p>
+          <a:p>
+            <a:pPr>
+              <a:spcAft>
+                <a:spcPts val="600"/>
+              </a:spcAft>
+            </a:pPr>
+            <a:r>
+              <a:rPr sz="1500">
+                <a:solidFill>
+                  <a:srgbClr val="22282E"/>
+                </a:solidFill>
+              </a:rPr>
+              <a:t>•  Vishing con clonación de voz: llamada fraudulenta usando una voz clonada de un directivo conocido. Característica: explota confianza y urgencia; deriva en transferencias.</a:t>
+            </a:r>
+          </a:p>
+          <a:p>
+            <a:pPr>
+              <a:spcAft>
+                <a:spcPts val="600"/>
+              </a:spcAft>
+            </a:pPr>
+            <a:r>
+              <a:rPr sz="1500">
+                <a:solidFill>
+                  <a:srgbClr val="22282E"/>
+                </a:solidFill>
+              </a:rPr>
+              <a:t>•  BEC (Business Email Compromise) asistido: correos de fraude redactados por LLM, sin errores idiomáticos y personalizados con OSINT. Característica: elimina las señales clásicas del phishing.</a:t>
+            </a:r>
+          </a:p>
+          <a:p>
+            <a:pPr>
+              <a:spcAft>
+                <a:spcPts val="600"/>
+              </a:spcAft>
+            </a:pPr>
+            <a:r>
+              <a:rPr sz="1500">
+                <a:solidFill>
+                  <a:srgbClr val="22282E"/>
+                </a:solidFill>
+              </a:rPr>
+              <a:t>•  C2PA / Content Credentials: estándar de procedencia que firma criptográficamente el origen y las ediciones de un contenido. Característica: verifica autenticidad en lugar de detectar falsedad.</a:t>
+            </a:r>
+          </a:p>
+          <a:p>
+            <a:pPr>
+              <a:spcAft>
+                <a:spcPts val="600"/>
+              </a:spcAft>
+            </a:pPr>
+            <a:r>
+              <a:rPr sz="1500">
+                <a:solidFill>
+                  <a:srgbClr val="22282E"/>
+                </a:solidFill>
+              </a:rPr>
+              <a:t>•  Watermarking de IA: marca imperceptible incrustada en contenido generado para identificarlo. Característica: frágil ante recompresión/edición.</a:t>
+            </a:r>
+          </a:p>
+          <a:p>
+            <a:pPr>
+              <a:spcAft>
+                <a:spcPts val="600"/>
+              </a:spcAft>
+            </a:pPr>
+            <a:r>
+              <a:rPr sz="1500">
+                <a:solidFill>
+                  <a:srgbClr val="22282E"/>
+                </a:solidFill>
+              </a:rPr>
+              <a:t>•  Verificación fuera de banda: confirmar una solicitud sensible por un canal distinto y previamente acordado. Característica: control organizativo robusto contra suplantación.</a:t>
             </a:r>
           </a:p>
         </p:txBody>
@@ -4748,7 +5139,7 @@
                   <a:srgbClr val="0B3D2E"/>
                 </a:solidFill>
               </a:rPr>
-              <a:t>📝 Reto verificable</a:t>
+              <a:t>🧰 Herramientas y preparación</a:t>
             </a:r>
           </a:p>
         </p:txBody>
@@ -4786,22 +5177,52 @@
                   <a:srgbClr val="22282E"/>
                 </a:solidFill>
               </a:rPr>
-              <a:t>•  Entrega un paquete de defensa anti-suplantación IA: (a) análisis de un caso de BEC/deepfake, (b) un procedimiento documentado de verificación fuera de banda para acciones sensibles, y (c) una guía de concienciación de una página.</a:t>
-            </a:r>
-          </a:p>
-          <a:p>
-            <a:pPr>
-              <a:spcAft>
-                <a:spcPts val="600"/>
-              </a:spcAft>
-            </a:pPr>
-            <a:r>
-              <a:rPr sz="1500">
-                <a:solidFill>
-                  <a:srgbClr val="22282E"/>
-                </a:solidFill>
-              </a:rPr>
-              <a:t>•  Criterio de aceptación: el procedimiento fuera de banda define umbral, canal alternativo acordado y regla de "sin excepciones por urgencia", y el caso analizado demuestra por qué la detección técnica por sí sola no habría bastado. Nada del entregable usa datos o identidades de terceros sin consentimiento.</a:t>
+              <a:t>•  Estándar C2PA y verificadores de Content Credentials (para inspeccionar procedencia de imágenes propias).</a:t>
+            </a:r>
+          </a:p>
+          <a:p>
+            <a:pPr>
+              <a:spcAft>
+                <a:spcPts val="600"/>
+              </a:spcAft>
+            </a:pPr>
+            <a:r>
+              <a:rPr sz="1500">
+                <a:solidFill>
+                  <a:srgbClr val="22282E"/>
+                </a:solidFill>
+              </a:rPr>
+              <a:t>•  Detectores de contenido sintético como referencia (entendiendo su fiabilidad limitada).</a:t>
+            </a:r>
+          </a:p>
+          <a:p>
+            <a:pPr>
+              <a:spcAft>
+                <a:spcPts val="600"/>
+              </a:spcAft>
+            </a:pPr>
+            <a:r>
+              <a:rPr sz="1500">
+                <a:solidFill>
+                  <a:srgbClr val="22282E"/>
+                </a:solidFill>
+              </a:rPr>
+              <a:t>•  Material propio y consentido para pruebas (tu propia voz/imagen), nunca de terceros.</a:t>
+            </a:r>
+          </a:p>
+          <a:p>
+            <a:pPr>
+              <a:spcAft>
+                <a:spcPts val="600"/>
+              </a:spcAft>
+            </a:pPr>
+            <a:r>
+              <a:rPr sz="1500">
+                <a:solidFill>
+                  <a:srgbClr val="22282E"/>
+                </a:solidFill>
+              </a:rPr>
+              <a:t>•  Un procedimiento de laboratorio para simular un intento de fraude (role-play controlado con compañeros que consienten).</a:t>
             </a:r>
           </a:p>
         </p:txBody>
